--- a/08-Presentation/Asmaa-Presentation.pptx
+++ b/08-Presentation/Asmaa-Presentation.pptx
@@ -6,7 +6,7 @@
     <p:sldMasterId id="2147483681" r:id="rId2"/>
   </p:sldMasterIdLst>
   <p:notesMasterIdLst>
-    <p:notesMasterId r:id="rId14"/>
+    <p:notesMasterId r:id="rId15"/>
   </p:notesMasterIdLst>
   <p:sldIdLst>
     <p:sldId id="256" r:id="rId3"/>
@@ -17,31 +17,32 @@
     <p:sldId id="299" r:id="rId8"/>
     <p:sldId id="257" r:id="rId9"/>
     <p:sldId id="262" r:id="rId10"/>
-    <p:sldId id="264" r:id="rId11"/>
-    <p:sldId id="267" r:id="rId12"/>
-    <p:sldId id="300" r:id="rId13"/>
+    <p:sldId id="301" r:id="rId11"/>
+    <p:sldId id="264" r:id="rId12"/>
+    <p:sldId id="267" r:id="rId13"/>
+    <p:sldId id="300" r:id="rId14"/>
   </p:sldIdLst>
   <p:sldSz cx="9144000" cy="5143500" type="screen16x9"/>
   <p:notesSz cx="6858000" cy="9144000"/>
   <p:embeddedFontLst>
     <p:embeddedFont>
       <p:font typeface="Anaheim" panose="020B0604020202020204" charset="0"/>
-      <p:regular r:id="rId15"/>
-      <p:bold r:id="rId16"/>
+      <p:regular r:id="rId16"/>
+      <p:bold r:id="rId17"/>
     </p:embeddedFont>
     <p:embeddedFont>
       <p:font typeface="Poppins" panose="00000500000000000000" pitchFamily="2" charset="0"/>
-      <p:regular r:id="rId17"/>
-      <p:bold r:id="rId18"/>
-      <p:italic r:id="rId19"/>
-      <p:boldItalic r:id="rId20"/>
+      <p:regular r:id="rId18"/>
+      <p:bold r:id="rId19"/>
+      <p:italic r:id="rId20"/>
+      <p:boldItalic r:id="rId21"/>
     </p:embeddedFont>
     <p:embeddedFont>
       <p:font typeface="Roboto Medium" panose="02000000000000000000" pitchFamily="2" charset="0"/>
-      <p:regular r:id="rId21"/>
-      <p:bold r:id="rId22"/>
-      <p:italic r:id="rId23"/>
-      <p:boldItalic r:id="rId24"/>
+      <p:regular r:id="rId22"/>
+      <p:bold r:id="rId23"/>
+      <p:italic r:id="rId24"/>
+      <p:boldItalic r:id="rId25"/>
     </p:embeddedFont>
   </p:embeddedFontLst>
   <p:defaultTextStyle>
@@ -279,8 +280,10 @@
 <file path=ppt/revisionInfo.xml><?xml version="1.0" encoding="utf-8"?>
 <p1510:revInfo xmlns:a="http://schemas.openxmlformats.org/drawingml/2006/main" xmlns:r="http://schemas.openxmlformats.org/officeDocument/2006/relationships" xmlns:p1510="http://schemas.microsoft.com/office/powerpoint/2015/10/main">
   <p1510:revLst>
+    <p1510:client id="{014743BE-1219-47BA-B29B-DC467E97AB98}" v="85" dt="2026-02-10T04:27:04.202"/>
     <p1510:client id="{0D6BBA16-84FC-4C9F-A23C-A37B11104EDE}" v="302" dt="2026-02-08T17:12:56.496"/>
     <p1510:client id="{0EF36317-306D-4EF0-9A4E-1D5F18C415DB}" v="191" dt="2026-02-08T19:12:50.125"/>
+    <p1510:client id="{5DD36A6A-7AEB-B712-2E03-CC0CBF7B291B}" v="4" dt="2026-02-09T16:38:43.356"/>
     <p1510:client id="{8E97466D-3B20-41AB-A7A5-32CC200ADA1A}" v="50" dt="2026-02-08T16:27:15.034"/>
     <p1510:client id="{9D5B01E1-8ADC-42D0-9476-AE4CCBBBF1A5}" v="175" dt="2026-02-08T18:53:19.072"/>
     <p1510:client id="{B81DE52B-ACF1-442C-886F-C7E1C99D8B9B}" v="275" dt="2026-02-08T19:52:51.732"/>
@@ -812,16 +815,65 @@
           </a:bodyPr>
           <a:lstStyle/>
           <a:p>
-            <a:pPr marL="0" lvl="0" indent="0" algn="l" rtl="0">
-              <a:spcBef>
-                <a:spcPts val="0"/>
-              </a:spcBef>
-              <a:spcAft>
-                <a:spcPts val="0"/>
-              </a:spcAft>
-              <a:buNone/>
+            <a:pPr marL="171450" lvl="0" indent="-171450" algn="l">
+              <a:spcBef>
+                <a:spcPts val="0"/>
+              </a:spcBef>
+              <a:spcAft>
+                <a:spcPts val="0"/>
+              </a:spcAft>
             </a:pPr>
-            <a:endParaRPr/>
+            <a:endParaRPr lang="en-US"/>
+          </a:p>
+          <a:p>
+            <a:pPr marL="171450" indent="-171450"/>
+            <a:r>
+              <a:rPr lang="en-US" b="1" dirty="0"/>
+              <a:t>It’s a pleasure to be here today</a:t>
+            </a:r>
+            <a:endParaRPr lang="en-US" dirty="0"/>
+          </a:p>
+          <a:p>
+            <a:pPr marL="171450" indent="-171450"/>
+            <a:r>
+              <a:rPr lang="en-US" b="1" dirty="0" err="1"/>
+              <a:t>Self introduction</a:t>
+            </a:r>
+            <a:endParaRPr lang="en-US" dirty="0" err="1"/>
+          </a:p>
+          <a:p>
+            <a:pPr marL="171450" indent="-171450"/>
+            <a:r>
+              <a:rPr lang="en-US" b="1" dirty="0" err="1"/>
+              <a:t>Tahaluf</a:t>
+            </a:r>
+            <a:r>
+              <a:rPr lang="en-US" b="1" dirty="0"/>
+              <a:t> Al Emarat training</a:t>
+            </a:r>
+            <a:endParaRPr lang="en-US" dirty="0"/>
+          </a:p>
+          <a:p>
+            <a:pPr marL="171450" indent="-171450"/>
+            <a:r>
+              <a:rPr lang="en-US" b="1" dirty="0"/>
+              <a:t>HTU Quality Assurance program</a:t>
+            </a:r>
+            <a:endParaRPr lang="en-US" dirty="0"/>
+          </a:p>
+          <a:p>
+            <a:pPr marL="171450" indent="-171450"/>
+            <a:r>
+              <a:rPr lang="en-US" b="1" dirty="0"/>
+              <a:t>Final project overview</a:t>
+            </a:r>
+            <a:endParaRPr lang="en-US" dirty="0"/>
+          </a:p>
+          <a:p>
+            <a:pPr marL="0" indent="0">
+              <a:buNone/>
+            </a:pPr>
+            <a:endParaRPr lang="en-US" dirty="0"/>
           </a:p>
         </p:txBody>
       </p:sp>
@@ -834,6 +886,158 @@
 </file>
 
 <file path=ppt/notesSlides/notesSlide10.xml><?xml version="1.0" encoding="utf-8"?>
+<p:notes xmlns:a="http://schemas.openxmlformats.org/drawingml/2006/main" xmlns:r="http://schemas.openxmlformats.org/officeDocument/2006/relationships" xmlns:p="http://schemas.openxmlformats.org/presentationml/2006/main" showMasterSp="0" showMasterPhAnim="0">
+  <p:cSld>
+    <p:spTree>
+      <p:nvGrpSpPr>
+        <p:cNvPr id="1" name="Shape 439"/>
+        <p:cNvGrpSpPr/>
+        <p:nvPr/>
+      </p:nvGrpSpPr>
+      <p:grpSpPr>
+        <a:xfrm>
+          <a:off x="0" y="0"/>
+          <a:ext cx="0" cy="0"/>
+          <a:chOff x="0" y="0"/>
+          <a:chExt cx="0" cy="0"/>
+        </a:xfrm>
+      </p:grpSpPr>
+      <p:sp>
+        <p:nvSpPr>
+          <p:cNvPr id="440" name="Google Shape;440;g184d99d1a72_0_57:notes"/>
+          <p:cNvSpPr>
+            <a:spLocks noGrp="1" noRot="1" noChangeAspect="1"/>
+          </p:cNvSpPr>
+          <p:nvPr>
+            <p:ph type="sldImg" idx="2"/>
+          </p:nvPr>
+        </p:nvSpPr>
+        <p:spPr>
+          <a:xfrm>
+            <a:off x="381000" y="685800"/>
+            <a:ext cx="6096000" cy="3429000"/>
+          </a:xfrm>
+          <a:custGeom>
+            <a:avLst/>
+            <a:gdLst/>
+            <a:ahLst/>
+            <a:cxnLst/>
+            <a:rect l="l" t="t" r="r" b="b"/>
+            <a:pathLst>
+              <a:path w="120000" h="120000" extrusionOk="0">
+                <a:moveTo>
+                  <a:pt x="0" y="0"/>
+                </a:moveTo>
+                <a:lnTo>
+                  <a:pt x="120000" y="0"/>
+                </a:lnTo>
+                <a:lnTo>
+                  <a:pt x="120000" y="120000"/>
+                </a:lnTo>
+                <a:lnTo>
+                  <a:pt x="0" y="120000"/>
+                </a:lnTo>
+                <a:close/>
+              </a:path>
+            </a:pathLst>
+          </a:custGeom>
+        </p:spPr>
+      </p:sp>
+      <p:sp>
+        <p:nvSpPr>
+          <p:cNvPr id="441" name="Google Shape;441;g184d99d1a72_0_57:notes"/>
+          <p:cNvSpPr txBox="1">
+            <a:spLocks noGrp="1"/>
+          </p:cNvSpPr>
+          <p:nvPr>
+            <p:ph type="body" idx="1"/>
+          </p:nvPr>
+        </p:nvSpPr>
+        <p:spPr>
+          <a:xfrm>
+            <a:off x="685800" y="4343400"/>
+            <a:ext cx="5486400" cy="4114800"/>
+          </a:xfrm>
+          <a:prstGeom prst="rect">
+            <a:avLst/>
+          </a:prstGeom>
+        </p:spPr>
+        <p:txBody>
+          <a:bodyPr spcFirstLastPara="1" wrap="square" lIns="91425" tIns="91425" rIns="91425" bIns="91425" anchor="t" anchorCtr="0">
+            <a:noAutofit/>
+          </a:bodyPr>
+          <a:lstStyle/>
+          <a:p>
+            <a:pPr marL="171450" indent="-171450"/>
+            <a:r>
+              <a:rPr lang="en-US" b="1" dirty="0"/>
+              <a:t>Used Selenium framework with Eclipse</a:t>
+            </a:r>
+            <a:endParaRPr lang="en-US" dirty="0"/>
+          </a:p>
+          <a:p>
+            <a:pPr marL="171450" indent="-171450"/>
+            <a:r>
+              <a:rPr lang="en-US" b="1" dirty="0"/>
+              <a:t>Implemented 22 automated test cases</a:t>
+            </a:r>
+            <a:endParaRPr lang="en-US" dirty="0"/>
+          </a:p>
+          <a:p>
+            <a:pPr marL="171450" indent="-171450"/>
+            <a:r>
+              <a:rPr lang="en-US" b="1" dirty="0"/>
+              <a:t>Created a dedicated package for test data</a:t>
+            </a:r>
+            <a:endParaRPr lang="en-US" dirty="0"/>
+          </a:p>
+          <a:p>
+            <a:pPr marL="171450" indent="-171450"/>
+            <a:r>
+              <a:rPr lang="en-US" b="1" dirty="0"/>
+              <a:t>Created a dedicated package for test cases</a:t>
+            </a:r>
+            <a:endParaRPr lang="en-US" dirty="0"/>
+          </a:p>
+          <a:p>
+            <a:pPr marL="171450" indent="-171450"/>
+            <a:r>
+              <a:rPr lang="en-US" b="1" dirty="0"/>
+              <a:t>A test suite was implemented to execute tests for multiple users</a:t>
+            </a:r>
+            <a:endParaRPr lang="en-US" dirty="0"/>
+          </a:p>
+          <a:p>
+            <a:pPr marL="171450" indent="-171450"/>
+            <a:r>
+              <a:rPr lang="en-US" b="1" dirty="0"/>
+              <a:t>Both happy path and negative scenarios were covered (7 scenarios)</a:t>
+            </a:r>
+            <a:endParaRPr lang="en-US" dirty="0"/>
+          </a:p>
+          <a:p>
+            <a:pPr marL="0" lvl="0" indent="0" algn="l">
+              <a:spcBef>
+                <a:spcPts val="0"/>
+              </a:spcBef>
+              <a:spcAft>
+                <a:spcPts val="0"/>
+              </a:spcAft>
+              <a:buNone/>
+            </a:pPr>
+            <a:endParaRPr dirty="0"/>
+          </a:p>
+        </p:txBody>
+      </p:sp>
+    </p:spTree>
+  </p:cSld>
+  <p:clrMapOvr>
+    <a:masterClrMapping/>
+  </p:clrMapOvr>
+</p:notes>
+</file>
+
+<file path=ppt/notesSlides/notesSlide11.xml><?xml version="1.0" encoding="utf-8"?>
 <p:notes xmlns:a="http://schemas.openxmlformats.org/drawingml/2006/main" xmlns:r="http://schemas.openxmlformats.org/officeDocument/2006/relationships" xmlns:p="http://schemas.openxmlformats.org/presentationml/2006/main" showMasterSp="0" showMasterPhAnim="0">
   <p:cSld>
     <p:spTree>
@@ -916,16 +1120,126 @@
           </a:bodyPr>
           <a:lstStyle/>
           <a:p>
-            <a:pPr marL="0" lvl="0" indent="0" algn="l" rtl="0">
-              <a:spcBef>
-                <a:spcPts val="0"/>
-              </a:spcBef>
-              <a:spcAft>
-                <a:spcPts val="0"/>
-              </a:spcAft>
+            <a:pPr>
               <a:buNone/>
             </a:pPr>
-            <a:endParaRPr/>
+            <a:r>
+              <a:rPr lang="en-US" dirty="0" err="1"/>
+              <a:t>تمام</a:t>
+            </a:r>
+            <a:r>
+              <a:rPr lang="en-US" dirty="0"/>
+              <a:t> 👌 </a:t>
+            </a:r>
+            <a:r>
+              <a:rPr lang="en-US" dirty="0" err="1"/>
+              <a:t>هاي</a:t>
+            </a:r>
+            <a:r>
+              <a:rPr lang="en-US" dirty="0"/>
+              <a:t> </a:t>
+            </a:r>
+            <a:r>
+              <a:rPr lang="en-US" dirty="0" err="1"/>
+              <a:t>صياغة</a:t>
+            </a:r>
+            <a:r>
+              <a:rPr lang="en-US" dirty="0"/>
+              <a:t> </a:t>
+            </a:r>
+            <a:r>
+              <a:rPr lang="en-US" b="1" dirty="0" err="1"/>
+              <a:t>مصقولة</a:t>
+            </a:r>
+            <a:r>
+              <a:rPr lang="en-US" b="1" dirty="0"/>
+              <a:t> </a:t>
+            </a:r>
+            <a:r>
+              <a:rPr lang="en-US" b="1" dirty="0" err="1"/>
+              <a:t>واحترافية</a:t>
+            </a:r>
+            <a:r>
+              <a:rPr lang="en-US" dirty="0"/>
+              <a:t> </a:t>
+            </a:r>
+            <a:r>
+              <a:rPr lang="en-US" dirty="0" err="1"/>
+              <a:t>وجاهزة</a:t>
+            </a:r>
+            <a:r>
+              <a:rPr lang="en-US" dirty="0"/>
+              <a:t> </a:t>
+            </a:r>
+            <a:r>
+              <a:rPr lang="en-US" dirty="0" err="1"/>
+              <a:t>للسلايد</a:t>
+            </a:r>
+            <a:r>
+              <a:rPr lang="en-US" dirty="0"/>
+              <a:t>:</a:t>
+            </a:r>
+          </a:p>
+          <a:p>
+            <a:pPr marL="171450" indent="-171450"/>
+            <a:r>
+              <a:rPr lang="en-US" b="1" dirty="0"/>
+              <a:t>Mobile testing was performed using Android Studio and Appium Inspector</a:t>
+            </a:r>
+            <a:endParaRPr lang="en-US" dirty="0"/>
+          </a:p>
+          <a:p>
+            <a:pPr marL="171450" indent="-171450"/>
+            <a:r>
+              <a:rPr lang="en-US" b="1" dirty="0"/>
+              <a:t>A total of three basic mobile test cases were executed</a:t>
+            </a:r>
+            <a:endParaRPr lang="en-US" dirty="0"/>
+          </a:p>
+          <a:p>
+            <a:pPr marL="171450" indent="-171450"/>
+            <a:r>
+              <a:rPr lang="en-US" b="1" dirty="0"/>
+              <a:t>Testing was conducted on the </a:t>
+            </a:r>
+            <a:r>
+              <a:rPr lang="en-US" b="1" dirty="0" err="1"/>
+              <a:t>SwagLabs</a:t>
+            </a:r>
+            <a:r>
+              <a:rPr lang="en-US" b="1" dirty="0"/>
+              <a:t> mobile application</a:t>
+            </a:r>
+            <a:endParaRPr lang="en-US" dirty="0"/>
+          </a:p>
+          <a:p>
+            <a:pPr marL="171450" indent="-171450"/>
+            <a:r>
+              <a:rPr lang="en-US" b="1" dirty="0"/>
+              <a:t>The test cases included login, add to cart, and remove from cart</a:t>
+            </a:r>
+            <a:endParaRPr lang="en-US" dirty="0"/>
+          </a:p>
+          <a:p>
+            <a:pPr indent="0">
+              <a:buNone/>
+            </a:pPr>
+            <a:r>
+              <a:rPr lang="en-US" dirty="0" err="1"/>
+              <a:t>إذا</a:t>
+            </a:r>
+          </a:p>
+          <a:p>
+            <a:pPr marL="0" lvl="0" indent="0" algn="l">
+              <a:spcBef>
+                <a:spcPts val="0"/>
+              </a:spcBef>
+              <a:spcAft>
+                <a:spcPts val="0"/>
+              </a:spcAft>
+              <a:buNone/>
+            </a:pPr>
+            <a:endParaRPr dirty="0"/>
           </a:p>
         </p:txBody>
       </p:sp>
@@ -937,7 +1251,7 @@
 </p:notes>
 </file>
 
-<file path=ppt/notesSlides/notesSlide11.xml><?xml version="1.0" encoding="utf-8"?>
+<file path=ppt/notesSlides/notesSlide12.xml><?xml version="1.0" encoding="utf-8"?>
 <p:notes xmlns:a="http://schemas.openxmlformats.org/drawingml/2006/main" xmlns:r="http://schemas.openxmlformats.org/officeDocument/2006/relationships" xmlns:p="http://schemas.openxmlformats.org/presentationml/2006/main" showMasterSp="0" showMasterPhAnim="0">
   <p:cSld>
     <p:spTree>
@@ -1038,16 +1352,33 @@
           </a:bodyPr>
           <a:lstStyle/>
           <a:p>
-            <a:pPr marL="0" lvl="0" indent="0" algn="l" rtl="0">
-              <a:spcBef>
-                <a:spcPts val="0"/>
-              </a:spcBef>
-              <a:spcAft>
-                <a:spcPts val="0"/>
-              </a:spcAft>
+            <a:pPr>
               <a:buNone/>
             </a:pPr>
-            <a:endParaRPr/>
+            <a:r>
+              <a:rPr lang="en-US" b="1"/>
+              <a:t>“In conclusion, this project demonstrates my ability to apply a complete QA process using different testing approaches and tools.</a:t>
+            </a:r>
+            <a:br>
+              <a:rPr lang="en-US" b="1" dirty="0"/>
+            </a:br>
+            <a:r>
+              <a:rPr lang="en-US" b="1"/>
+              <a:t> Thank you for your time, and I’m happy to answer any questions.”</a:t>
+            </a:r>
+            <a:endParaRPr lang="en-US"/>
+          </a:p>
+          <a:p>
+            <a:pPr marL="0" lvl="0" indent="0" algn="l">
+              <a:spcBef>
+                <a:spcPts val="0"/>
+              </a:spcBef>
+              <a:spcAft>
+                <a:spcPts val="0"/>
+              </a:spcAft>
+              <a:buNone/>
+            </a:pPr>
+            <a:endParaRPr dirty="0"/>
           </a:p>
         </p:txBody>
       </p:sp>
@@ -1172,7 +1503,23 @@
             </a:endParaRPr>
           </a:p>
           <a:p>
-            <a:pPr marL="0" lvl="0" indent="0" algn="l" rtl="0">
+            <a:pPr marL="285750" indent="-285750"/>
+            <a:r>
+              <a:rPr lang="en-US" b="1" dirty="0"/>
+              <a:t>The project consists of seven main parts</a:t>
+            </a:r>
+            <a:endParaRPr lang="en-US" dirty="0"/>
+          </a:p>
+          <a:p>
+            <a:pPr marL="285750" indent="-285750"/>
+            <a:r>
+              <a:rPr lang="en-US" b="1" dirty="0"/>
+              <a:t>Through each part, I will explain how it was implemented in this project</a:t>
+            </a:r>
+            <a:endParaRPr lang="en-US" dirty="0"/>
+          </a:p>
+          <a:p>
+            <a:pPr marL="0" lvl="0" indent="0" algn="l">
               <a:spcBef>
                 <a:spcPts val="0"/>
               </a:spcBef>
@@ -1181,7 +1528,7 @@
               </a:spcAft>
               <a:buNone/>
             </a:pPr>
-            <a:endParaRPr/>
+            <a:endParaRPr dirty="0"/>
           </a:p>
         </p:txBody>
       </p:sp>
@@ -1276,7 +1623,23 @@
           </a:bodyPr>
           <a:lstStyle/>
           <a:p>
-            <a:pPr marL="0" lvl="0" indent="0" algn="l" rtl="0">
+            <a:pPr marL="171450" indent="-171450"/>
+            <a:r>
+              <a:rPr lang="en-US" b="1" dirty="0"/>
+              <a:t>As a QA engineer, having a clear test plan is essential before starting any testing activities</a:t>
+            </a:r>
+            <a:endParaRPr lang="en-US" dirty="0"/>
+          </a:p>
+          <a:p>
+            <a:pPr marL="171450" indent="-171450"/>
+            <a:r>
+              <a:rPr lang="en-US" b="1" dirty="0"/>
+              <a:t>A comprehensive test plan was created for the demo application</a:t>
+            </a:r>
+            <a:endParaRPr lang="en-US" dirty="0"/>
+          </a:p>
+          <a:p>
+            <a:pPr marL="0" lvl="0" indent="0" algn="l">
               <a:spcBef>
                 <a:spcPts val="0"/>
               </a:spcBef>
@@ -1285,7 +1648,7 @@
               </a:spcAft>
               <a:buNone/>
             </a:pPr>
-            <a:endParaRPr/>
+            <a:endParaRPr dirty="0"/>
           </a:p>
         </p:txBody>
       </p:sp>
@@ -1398,7 +1761,55 @@
           </a:bodyPr>
           <a:lstStyle/>
           <a:p>
-            <a:pPr marL="0" lvl="0" indent="0" algn="l" rtl="0">
+            <a:pPr marL="171450" indent="-171450"/>
+            <a:r>
+              <a:rPr lang="en-US" b="1" dirty="0"/>
+              <a:t>Covered all user roles in the system</a:t>
+            </a:r>
+            <a:endParaRPr lang="en-US" dirty="0"/>
+          </a:p>
+          <a:p>
+            <a:pPr marL="171450" indent="-171450"/>
+            <a:r>
+              <a:rPr lang="en-US" b="1" dirty="0"/>
+              <a:t>Created and executed 59 manual test cases</a:t>
+            </a:r>
+            <a:endParaRPr lang="en-US" dirty="0"/>
+          </a:p>
+          <a:p>
+            <a:pPr marL="171450" indent="-171450"/>
+            <a:r>
+              <a:rPr lang="en-US" b="1" dirty="0"/>
+              <a:t>Reported 22 documented defects</a:t>
+            </a:r>
+            <a:endParaRPr lang="en-US" dirty="0"/>
+          </a:p>
+          <a:p>
+            <a:pPr marL="171450" indent="-171450"/>
+            <a:r>
+              <a:rPr lang="en-US" b="1" dirty="0"/>
+              <a:t>As shown, test cases and bug reports followed a clear structure</a:t>
+            </a:r>
+            <a:endParaRPr lang="en-US" dirty="0"/>
+          </a:p>
+          <a:p>
+            <a:pPr marL="171450" indent="-171450"/>
+            <a:r>
+              <a:rPr lang="en-US" b="1" dirty="0"/>
+              <a:t>Included all essential fields</a:t>
+            </a:r>
+            <a:endParaRPr lang="en-US" dirty="0"/>
+          </a:p>
+          <a:p>
+            <a:pPr marL="171450" indent="-171450"/>
+            <a:r>
+              <a:rPr lang="en-US" b="1" dirty="0"/>
+              <a:t>Ensured traceability between test cases and defects</a:t>
+            </a:r>
+            <a:endParaRPr lang="en-US" dirty="0"/>
+          </a:p>
+          <a:p>
+            <a:pPr marL="0" lvl="0" indent="0" algn="l">
               <a:spcBef>
                 <a:spcPts val="0"/>
               </a:spcBef>
@@ -1407,7 +1818,7 @@
               </a:spcAft>
               <a:buNone/>
             </a:pPr>
-            <a:endParaRPr/>
+            <a:endParaRPr dirty="0"/>
           </a:p>
         </p:txBody>
       </p:sp>
@@ -1507,7 +1918,35 @@
           </a:bodyPr>
           <a:lstStyle/>
           <a:p>
-            <a:pPr marL="0" lvl="0" indent="0" algn="l" rtl="0">
+            <a:pPr marL="171450" indent="-171450"/>
+            <a:r>
+              <a:rPr lang="en-US" b="1" dirty="0" err="1"/>
+              <a:t>DummyJSON</a:t>
+            </a:r>
+            <a:r>
+              <a:rPr lang="en-US" b="1" dirty="0"/>
+              <a:t> API</a:t>
+            </a:r>
+            <a:endParaRPr lang="en-US" dirty="0"/>
+          </a:p>
+          <a:p>
+            <a:pPr marL="171450" indent="-171450"/>
+            <a:r>
+              <a:rPr lang="en-US" b="1" dirty="0"/>
+              <a:t>Postman collection structure</a:t>
+            </a:r>
+            <a:endParaRPr lang="en-US" dirty="0"/>
+          </a:p>
+          <a:p>
+            <a:pPr marL="171450" indent="-171450"/>
+            <a:r>
+              <a:rPr lang="en-US" b="1" dirty="0"/>
+              <a:t>Environment variables configuration</a:t>
+            </a:r>
+            <a:endParaRPr lang="en-US" dirty="0"/>
+          </a:p>
+          <a:p>
+            <a:pPr marL="0" lvl="0" indent="0" algn="l">
               <a:spcBef>
                 <a:spcPts val="0"/>
               </a:spcBef>
@@ -1516,7 +1955,7 @@
               </a:spcAft>
               <a:buNone/>
             </a:pPr>
-            <a:endParaRPr/>
+            <a:endParaRPr dirty="0"/>
           </a:p>
         </p:txBody>
       </p:sp>
@@ -1629,7 +2068,31 @@
           </a:bodyPr>
           <a:lstStyle/>
           <a:p>
-            <a:pPr marL="0" lvl="0" indent="0" algn="l" rtl="0">
+            <a:pPr marL="171450" indent="-171450"/>
+            <a:r>
+              <a:rPr lang="en-US" b="1" dirty="0"/>
+              <a:t>23 API requests</a:t>
+            </a:r>
+            <a:endParaRPr lang="en-US" dirty="0"/>
+          </a:p>
+          <a:p>
+            <a:pPr marL="171450" indent="-171450"/>
+            <a:r>
+              <a:rPr lang="en-US" b="1" dirty="0"/>
+              <a:t>Randomized test data</a:t>
+            </a:r>
+            <a:endParaRPr lang="en-US" dirty="0"/>
+          </a:p>
+          <a:p>
+            <a:pPr marL="171450" indent="-171450"/>
+            <a:r>
+              <a:rPr lang="en-US" b="1" dirty="0"/>
+              <a:t>Data-driven testing using a CSV file</a:t>
+            </a:r>
+            <a:endParaRPr lang="en-US" dirty="0"/>
+          </a:p>
+          <a:p>
+            <a:pPr marL="0" lvl="0" indent="0" algn="l">
               <a:spcBef>
                 <a:spcPts val="0"/>
               </a:spcBef>
@@ -1638,7 +2101,7 @@
               </a:spcAft>
               <a:buNone/>
             </a:pPr>
-            <a:endParaRPr/>
+            <a:endParaRPr dirty="0"/>
           </a:p>
         </p:txBody>
       </p:sp>
@@ -1738,7 +2201,47 @@
           </a:bodyPr>
           <a:lstStyle/>
           <a:p>
-            <a:pPr marL="0" lvl="0" indent="0" algn="l" rtl="0">
+            <a:pPr marL="171450" indent="-171450"/>
+            <a:r>
+              <a:rPr lang="en-US" b="1" dirty="0"/>
+              <a:t>A mandatory Newman test was generated to provide a clear execution summary</a:t>
+            </a:r>
+            <a:endParaRPr lang="en-US" dirty="0"/>
+          </a:p>
+          <a:p>
+            <a:pPr marL="171450" indent="-171450"/>
+            <a:r>
+              <a:rPr lang="en-US" b="1" dirty="0"/>
+              <a:t>Three iterations were executed using the CSV file</a:t>
+            </a:r>
+            <a:endParaRPr lang="en-US" dirty="0"/>
+          </a:p>
+          <a:p>
+            <a:pPr marL="171450" indent="-171450"/>
+            <a:r>
+              <a:rPr lang="en-US" b="1" dirty="0"/>
+              <a:t>429 assertions were performed</a:t>
+            </a:r>
+            <a:endParaRPr lang="en-US" dirty="0"/>
+          </a:p>
+          <a:p>
+            <a:pPr marL="171450" indent="-171450"/>
+            <a:r>
+              <a:rPr lang="en-US" b="1" dirty="0"/>
+              <a:t>18 assertions failed as part of negative test scenarios</a:t>
+            </a:r>
+            <a:endParaRPr lang="en-US" dirty="0"/>
+          </a:p>
+          <a:p>
+            <a:pPr marL="171450" indent="-171450"/>
+            <a:r>
+              <a:rPr lang="en-US" b="1" dirty="0"/>
+              <a:t>Zero skipped tests, indicating that all endpoints were fully tested</a:t>
+            </a:r>
+            <a:endParaRPr lang="en-US" dirty="0"/>
+          </a:p>
+          <a:p>
+            <a:pPr marL="0" lvl="0" indent="0" algn="l">
               <a:spcBef>
                 <a:spcPts val="0"/>
               </a:spcBef>
@@ -1747,7 +2250,7 @@
               </a:spcAft>
               <a:buNone/>
             </a:pPr>
-            <a:endParaRPr/>
+            <a:endParaRPr dirty="0"/>
           </a:p>
         </p:txBody>
       </p:sp>
@@ -1842,7 +2345,31 @@
           </a:bodyPr>
           <a:lstStyle/>
           <a:p>
-            <a:pPr marL="0" lvl="0" indent="0" algn="l" rtl="0">
+            <a:pPr marL="171450" indent="-171450"/>
+            <a:r>
+              <a:rPr lang="en-US" b="1" dirty="0"/>
+              <a:t>Current related API endpoints</a:t>
+            </a:r>
+            <a:endParaRPr lang="en-US" dirty="0"/>
+          </a:p>
+          <a:p>
+            <a:pPr marL="171450" indent="-171450"/>
+            <a:r>
+              <a:rPr lang="en-US" b="1" dirty="0"/>
+              <a:t>Two test scenarios were conducted: smoke test and load test</a:t>
+            </a:r>
+            <a:endParaRPr lang="en-US" dirty="0"/>
+          </a:p>
+          <a:p>
+            <a:pPr marL="171450" indent="-171450"/>
+            <a:r>
+              <a:rPr lang="en-US" b="1" dirty="0"/>
+              <a:t>Defined thresholds for HTTP request duration, HTTP request failures, and checks</a:t>
+            </a:r>
+            <a:endParaRPr lang="en-US" dirty="0"/>
+          </a:p>
+          <a:p>
+            <a:pPr marL="0" lvl="0" indent="0" algn="l">
               <a:spcBef>
                 <a:spcPts val="0"/>
               </a:spcBef>
@@ -1851,7 +2378,7 @@
               </a:spcAft>
               <a:buNone/>
             </a:pPr>
-            <a:endParaRPr/>
+            <a:endParaRPr dirty="0"/>
           </a:p>
         </p:txBody>
       </p:sp>
@@ -1864,11 +2391,11 @@
 </file>
 
 <file path=ppt/notesSlides/notesSlide9.xml><?xml version="1.0" encoding="utf-8"?>
-<p:notes xmlns:a="http://schemas.openxmlformats.org/drawingml/2006/main" xmlns:r="http://schemas.openxmlformats.org/officeDocument/2006/relationships" xmlns:p="http://schemas.openxmlformats.org/presentationml/2006/main" showMasterSp="0" showMasterPhAnim="0">
+<p:notes xmlns:a="http://schemas.openxmlformats.org/drawingml/2006/main" xmlns:r="http://schemas.openxmlformats.org/officeDocument/2006/relationships" xmlns:p="http://schemas.openxmlformats.org/presentationml/2006/main">
   <p:cSld>
     <p:spTree>
       <p:nvGrpSpPr>
-        <p:cNvPr id="1" name="Shape 439"/>
+        <p:cNvPr id="1" name=""/>
         <p:cNvGrpSpPr/>
         <p:nvPr/>
       </p:nvGrpSpPr>
@@ -1882,84 +2409,88 @@
       </p:grpSpPr>
       <p:sp>
         <p:nvSpPr>
-          <p:cNvPr id="440" name="Google Shape;440;g184d99d1a72_0_57:notes"/>
+          <p:cNvPr id="2" name="Slide Image Placeholder 1"/>
           <p:cNvSpPr>
             <a:spLocks noGrp="1" noRot="1" noChangeAspect="1"/>
           </p:cNvSpPr>
           <p:nvPr>
-            <p:ph type="sldImg" idx="2"/>
+            <p:ph type="sldImg"/>
           </p:nvPr>
         </p:nvSpPr>
-        <p:spPr>
-          <a:xfrm>
-            <a:off x="381000" y="685800"/>
-            <a:ext cx="6096000" cy="3429000"/>
-          </a:xfrm>
-          <a:custGeom>
-            <a:avLst/>
-            <a:gdLst/>
-            <a:ahLst/>
-            <a:cxnLst/>
-            <a:rect l="l" t="t" r="r" b="b"/>
-            <a:pathLst>
-              <a:path w="120000" h="120000" extrusionOk="0">
-                <a:moveTo>
-                  <a:pt x="0" y="0"/>
-                </a:moveTo>
-                <a:lnTo>
-                  <a:pt x="120000" y="0"/>
-                </a:lnTo>
-                <a:lnTo>
-                  <a:pt x="120000" y="120000"/>
-                </a:lnTo>
-                <a:lnTo>
-                  <a:pt x="0" y="120000"/>
-                </a:lnTo>
-                <a:close/>
-              </a:path>
-            </a:pathLst>
-          </a:custGeom>
-        </p:spPr>
+        <p:spPr/>
       </p:sp>
       <p:sp>
         <p:nvSpPr>
-          <p:cNvPr id="441" name="Google Shape;441;g184d99d1a72_0_57:notes"/>
-          <p:cNvSpPr txBox="1">
+          <p:cNvPr id="3" name="Notes Placeholder 2"/>
+          <p:cNvSpPr>
             <a:spLocks noGrp="1"/>
           </p:cNvSpPr>
           <p:nvPr>
             <p:ph type="body" idx="1"/>
           </p:nvPr>
         </p:nvSpPr>
-        <p:spPr>
-          <a:xfrm>
-            <a:off x="685800" y="4343400"/>
-            <a:ext cx="5486400" cy="4114800"/>
-          </a:xfrm>
-          <a:prstGeom prst="rect">
-            <a:avLst/>
-          </a:prstGeom>
-        </p:spPr>
+        <p:spPr/>
         <p:txBody>
-          <a:bodyPr spcFirstLastPara="1" wrap="square" lIns="91425" tIns="91425" rIns="91425" bIns="91425" anchor="t" anchorCtr="0">
-            <a:noAutofit/>
-          </a:bodyPr>
+          <a:bodyPr/>
           <a:lstStyle/>
           <a:p>
-            <a:pPr marL="0" lvl="0" indent="0" algn="l" rtl="0">
-              <a:spcBef>
-                <a:spcPts val="0"/>
-              </a:spcBef>
-              <a:spcAft>
-                <a:spcPts val="0"/>
-              </a:spcAft>
-              <a:buNone/>
+            <a:pPr marL="285750" indent="-285750">
+              <a:buChar char="•"/>
             </a:pPr>
-            <a:endParaRPr/>
+            <a:r>
+              <a:rPr lang="en-US" b="1" dirty="0"/>
+              <a:t>As a result, the system remained stable</a:t>
+            </a:r>
+            <a:endParaRPr lang="en-US" dirty="0"/>
+          </a:p>
+          <a:p>
+            <a:pPr marL="285750" indent="-285750">
+              <a:buChar char="•"/>
+            </a:pPr>
+            <a:r>
+              <a:rPr lang="en-US" b="1" dirty="0"/>
+              <a:t>No failed requests were detected</a:t>
+            </a:r>
+            <a:endParaRPr lang="en-US" dirty="0"/>
+          </a:p>
+          <a:p>
+            <a:pPr marL="285750" indent="-285750">
+              <a:buChar char="•"/>
+            </a:pPr>
+            <a:r>
+              <a:rPr lang="en-US" b="1" dirty="0"/>
+              <a:t>Response times were within acceptable limits</a:t>
+            </a:r>
+            <a:endParaRPr lang="en-US" dirty="0"/>
+          </a:p>
+          <a:p>
+            <a:pPr marL="285750" indent="-285750">
+              <a:buChar char="•"/>
+            </a:pPr>
+            <a:r>
+              <a:rPr lang="en-US" b="1" dirty="0"/>
+              <a:t>The system met the defined performance acceptance criteria</a:t>
+            </a:r>
+            <a:endParaRPr lang="en-US" dirty="0"/>
+          </a:p>
+          <a:p>
+            <a:pPr>
+              <a:buNone/>
+            </a:pPr>
+            <a:endParaRPr lang="en-US" dirty="0">
+              <a:latin typeface="Calibri"/>
+              <a:ea typeface="Calibri"/>
+              <a:cs typeface="Calibri"/>
+            </a:endParaRPr>
           </a:p>
         </p:txBody>
       </p:sp>
     </p:spTree>
+    <p:extLst>
+      <p:ext uri="{BB962C8B-B14F-4D97-AF65-F5344CB8AC3E}">
+        <p14:creationId xmlns:p14="http://schemas.microsoft.com/office/powerpoint/2010/main" val="3366146495"/>
+      </p:ext>
+    </p:extLst>
   </p:cSld>
   <p:clrMapOvr>
     <a:masterClrMapping/>
@@ -23990,6 +24521,349 @@
   <p:cSld>
     <p:spTree>
       <p:nvGrpSpPr>
+        <p:cNvPr id="1" name="Shape 442"/>
+        <p:cNvGrpSpPr/>
+        <p:nvPr/>
+      </p:nvGrpSpPr>
+      <p:grpSpPr>
+        <a:xfrm>
+          <a:off x="0" y="0"/>
+          <a:ext cx="0" cy="0"/>
+          <a:chOff x="0" y="0"/>
+          <a:chExt cx="0" cy="0"/>
+        </a:xfrm>
+      </p:grpSpPr>
+      <p:sp>
+        <p:nvSpPr>
+          <p:cNvPr id="443" name="Google Shape;443;p43"/>
+          <p:cNvSpPr txBox="1">
+            <a:spLocks noGrp="1"/>
+          </p:cNvSpPr>
+          <p:nvPr>
+            <p:ph type="subTitle" idx="6"/>
+          </p:nvPr>
+        </p:nvSpPr>
+        <p:spPr>
+          <a:xfrm>
+            <a:off x="720000" y="3146911"/>
+            <a:ext cx="3549600" cy="375000"/>
+          </a:xfrm>
+          <a:prstGeom prst="rect">
+            <a:avLst/>
+          </a:prstGeom>
+        </p:spPr>
+        <p:txBody>
+          <a:bodyPr spcFirstLastPara="1" wrap="square" lIns="91425" tIns="91425" rIns="91425" bIns="91425" anchor="b" anchorCtr="0">
+            <a:noAutofit/>
+          </a:bodyPr>
+          <a:lstStyle/>
+          <a:p>
+            <a:pPr marL="0" indent="0"/>
+            <a:r>
+              <a:rPr lang="en"/>
+              <a:t>Design Approach:</a:t>
+            </a:r>
+            <a:endParaRPr lang="en-US"/>
+          </a:p>
+        </p:txBody>
+      </p:sp>
+      <p:sp>
+        <p:nvSpPr>
+          <p:cNvPr id="444" name="Google Shape;444;p43"/>
+          <p:cNvSpPr txBox="1">
+            <a:spLocks noGrp="1"/>
+          </p:cNvSpPr>
+          <p:nvPr>
+            <p:ph type="title"/>
+          </p:nvPr>
+        </p:nvSpPr>
+        <p:spPr>
+          <a:xfrm>
+            <a:off x="720000" y="539500"/>
+            <a:ext cx="7704000" cy="572700"/>
+          </a:xfrm>
+          <a:prstGeom prst="rect">
+            <a:avLst/>
+          </a:prstGeom>
+        </p:spPr>
+        <p:txBody>
+          <a:bodyPr spcFirstLastPara="1" wrap="square" lIns="91425" tIns="91425" rIns="91425" bIns="91425" anchor="t" anchorCtr="0">
+            <a:noAutofit/>
+          </a:bodyPr>
+          <a:lstStyle/>
+          <a:p>
+            <a:r>
+              <a:rPr lang="en"/>
+              <a:t>UI Automation Testing</a:t>
+            </a:r>
+            <a:endParaRPr lang="en-US"/>
+          </a:p>
+        </p:txBody>
+      </p:sp>
+      <p:sp>
+        <p:nvSpPr>
+          <p:cNvPr id="445" name="Google Shape;445;p43"/>
+          <p:cNvSpPr txBox="1">
+            <a:spLocks noGrp="1"/>
+          </p:cNvSpPr>
+          <p:nvPr>
+            <p:ph type="subTitle" idx="1"/>
+          </p:nvPr>
+        </p:nvSpPr>
+        <p:spPr>
+          <a:xfrm>
+            <a:off x="422507" y="1679350"/>
+            <a:ext cx="3549600" cy="1207800"/>
+          </a:xfrm>
+          <a:prstGeom prst="rect">
+            <a:avLst/>
+          </a:prstGeom>
+        </p:spPr>
+        <p:txBody>
+          <a:bodyPr spcFirstLastPara="1" wrap="square" lIns="91425" tIns="91425" rIns="91425" bIns="91425" anchor="t" anchorCtr="0">
+            <a:noAutofit/>
+          </a:bodyPr>
+          <a:lstStyle/>
+          <a:p>
+            <a:pPr marL="285750" indent="-285750">
+              <a:buFont typeface="Arial"/>
+              <a:buChar char="•"/>
+            </a:pPr>
+            <a:r>
+              <a:rPr lang="en"/>
+              <a:t>Tests organized into separate classes based on functionality</a:t>
+            </a:r>
+            <a:endParaRPr lang="en-US"/>
+          </a:p>
+          <a:p>
+            <a:pPr marL="285750" indent="-285750">
+              <a:buFont typeface="Arial"/>
+              <a:buChar char="•"/>
+            </a:pPr>
+            <a:r>
+              <a:rPr lang="en"/>
+              <a:t>User-related actions handled in dedicated classes</a:t>
+            </a:r>
+          </a:p>
+          <a:p>
+            <a:pPr marL="285750" indent="-285750">
+              <a:buFont typeface="Arial"/>
+              <a:buChar char="•"/>
+            </a:pPr>
+            <a:r>
+              <a:rPr lang="en"/>
+              <a:t>Test data separated into independent data classes</a:t>
+            </a:r>
+          </a:p>
+          <a:p>
+            <a:pPr marL="0" lvl="0" indent="0" algn="l">
+              <a:spcBef>
+                <a:spcPts val="0"/>
+              </a:spcBef>
+              <a:spcAft>
+                <a:spcPts val="0"/>
+              </a:spcAft>
+              <a:buNone/>
+            </a:pPr>
+            <a:endParaRPr lang="en"/>
+          </a:p>
+        </p:txBody>
+      </p:sp>
+      <p:sp>
+        <p:nvSpPr>
+          <p:cNvPr id="447" name="Google Shape;447;p43"/>
+          <p:cNvSpPr txBox="1">
+            <a:spLocks noGrp="1"/>
+          </p:cNvSpPr>
+          <p:nvPr>
+            <p:ph type="subTitle" idx="3"/>
+          </p:nvPr>
+        </p:nvSpPr>
+        <p:spPr>
+          <a:xfrm>
+            <a:off x="422507" y="3396201"/>
+            <a:ext cx="3549600" cy="1489635"/>
+          </a:xfrm>
+          <a:prstGeom prst="rect">
+            <a:avLst/>
+          </a:prstGeom>
+        </p:spPr>
+        <p:txBody>
+          <a:bodyPr spcFirstLastPara="1" wrap="square" lIns="91425" tIns="91425" rIns="91425" bIns="91425" anchor="t" anchorCtr="0">
+            <a:noAutofit/>
+          </a:bodyPr>
+          <a:lstStyle/>
+          <a:p>
+            <a:pPr marL="285750" indent="-285750">
+              <a:buFont typeface="Arial"/>
+              <a:buChar char="•"/>
+            </a:pPr>
+            <a:r>
+              <a:rPr lang="en"/>
+              <a:t>Inheritance applied to reduce duplication</a:t>
+            </a:r>
+            <a:endParaRPr lang="en-US"/>
+          </a:p>
+          <a:p>
+            <a:pPr marL="285750" indent="-285750">
+              <a:buFont typeface="Arial"/>
+              <a:buChar char="•"/>
+            </a:pPr>
+            <a:r>
+              <a:rPr lang="en"/>
+              <a:t>Centralized base/source class for setup and configuration</a:t>
+            </a:r>
+          </a:p>
+          <a:p>
+            <a:pPr marL="285750" indent="-285750">
+              <a:buFont typeface="Arial"/>
+              <a:buChar char="•"/>
+            </a:pPr>
+            <a:r>
+              <a:rPr lang="en"/>
+              <a:t>Test suite used to manage and execute tests</a:t>
+            </a:r>
+          </a:p>
+          <a:p>
+            <a:pPr marL="285750" indent="-285750">
+              <a:buFont typeface="Arial"/>
+              <a:buChar char="•"/>
+            </a:pPr>
+            <a:r>
+              <a:rPr lang="en"/>
+              <a:t>Total Automated Tests: </a:t>
+            </a:r>
+            <a:r>
+              <a:rPr lang="en" b="1"/>
+              <a:t>22</a:t>
+            </a:r>
+            <a:r>
+              <a:rPr lang="en"/>
+              <a:t> UI Test Cases</a:t>
+            </a:r>
+          </a:p>
+          <a:p>
+            <a:pPr marL="0" lvl="0" indent="0" algn="l">
+              <a:spcBef>
+                <a:spcPts val="0"/>
+              </a:spcBef>
+              <a:spcAft>
+                <a:spcPts val="0"/>
+              </a:spcAft>
+              <a:buNone/>
+            </a:pPr>
+            <a:endParaRPr lang="en"/>
+          </a:p>
+        </p:txBody>
+      </p:sp>
+      <p:sp>
+        <p:nvSpPr>
+          <p:cNvPr id="449" name="Google Shape;449;p43"/>
+          <p:cNvSpPr txBox="1">
+            <a:spLocks noGrp="1"/>
+          </p:cNvSpPr>
+          <p:nvPr>
+            <p:ph type="subTitle" idx="5"/>
+          </p:nvPr>
+        </p:nvSpPr>
+        <p:spPr>
+          <a:xfrm>
+            <a:off x="720000" y="1429886"/>
+            <a:ext cx="3549600" cy="375000"/>
+          </a:xfrm>
+          <a:prstGeom prst="rect">
+            <a:avLst/>
+          </a:prstGeom>
+        </p:spPr>
+        <p:txBody>
+          <a:bodyPr spcFirstLastPara="1" wrap="square" lIns="91425" tIns="91425" rIns="91425" bIns="91425" anchor="b" anchorCtr="0">
+            <a:noAutofit/>
+          </a:bodyPr>
+          <a:lstStyle/>
+          <a:p>
+            <a:pPr marL="0" indent="0"/>
+            <a:r>
+              <a:rPr lang="en"/>
+              <a:t>Framework Structure:</a:t>
+            </a:r>
+            <a:endParaRPr lang="en-US"/>
+          </a:p>
+        </p:txBody>
+      </p:sp>
+      <p:pic>
+        <p:nvPicPr>
+          <p:cNvPr id="14" name="Picture 13" descr="A screenshot of a computer program&#10;&#10;AI-generated content may be incorrect.">
+            <a:extLst>
+              <a:ext uri="{FF2B5EF4-FFF2-40B4-BE49-F238E27FC236}">
+                <a16:creationId xmlns:a16="http://schemas.microsoft.com/office/drawing/2014/main" id="{807F2544-DFF8-7D3E-55C4-3905B6660D47}"/>
+              </a:ext>
+            </a:extLst>
+          </p:cNvPr>
+          <p:cNvPicPr>
+            <a:picLocks noChangeAspect="1"/>
+          </p:cNvPicPr>
+          <p:nvPr/>
+        </p:nvPicPr>
+        <p:blipFill>
+          <a:blip r:embed="rId3"/>
+          <a:stretch>
+            <a:fillRect/>
+          </a:stretch>
+        </p:blipFill>
+        <p:spPr>
+          <a:xfrm>
+            <a:off x="3970424" y="1356726"/>
+            <a:ext cx="2079974" cy="3573049"/>
+          </a:xfrm>
+          <a:prstGeom prst="rect">
+            <a:avLst/>
+          </a:prstGeom>
+        </p:spPr>
+      </p:pic>
+      <p:pic>
+        <p:nvPicPr>
+          <p:cNvPr id="2" name="Picture 1" descr="A screenshot of a computer&#10;&#10;AI-generated content may be incorrect.">
+            <a:extLst>
+              <a:ext uri="{FF2B5EF4-FFF2-40B4-BE49-F238E27FC236}">
+                <a16:creationId xmlns:a16="http://schemas.microsoft.com/office/drawing/2014/main" id="{CC556F98-B8E2-23D4-0738-BD5FC3019F05}"/>
+              </a:ext>
+            </a:extLst>
+          </p:cNvPr>
+          <p:cNvPicPr>
+            <a:picLocks noChangeAspect="1"/>
+          </p:cNvPicPr>
+          <p:nvPr/>
+        </p:nvPicPr>
+        <p:blipFill>
+          <a:blip r:embed="rId4"/>
+          <a:srcRect l="-986" t="568" r="26035" b="-2467"/>
+          <a:stretch>
+            <a:fillRect/>
+          </a:stretch>
+        </p:blipFill>
+        <p:spPr>
+          <a:xfrm>
+            <a:off x="6101020" y="2098056"/>
+            <a:ext cx="2929135" cy="2097511"/>
+          </a:xfrm>
+          <a:prstGeom prst="rect">
+            <a:avLst/>
+          </a:prstGeom>
+        </p:spPr>
+      </p:pic>
+    </p:spTree>
+  </p:cSld>
+  <p:clrMapOvr>
+    <a:masterClrMapping/>
+  </p:clrMapOvr>
+</p:sld>
+</file>
+
+<file path=ppt/slides/slide11.xml><?xml version="1.0" encoding="utf-8"?>
+<p:sld xmlns:a="http://schemas.openxmlformats.org/drawingml/2006/main" xmlns:r="http://schemas.openxmlformats.org/officeDocument/2006/relationships" xmlns:p="http://schemas.openxmlformats.org/presentationml/2006/main">
+  <p:cSld>
+    <p:spTree>
+      <p:nvGrpSpPr>
         <p:cNvPr id="1" name="Shape 482"/>
         <p:cNvGrpSpPr/>
         <p:nvPr/>
@@ -24028,10 +24902,10 @@
           <a:lstStyle/>
           <a:p>
             <a:r>
-              <a:rPr lang="en" sz="3200" dirty="0"/>
+              <a:rPr lang="en" sz="3200"/>
               <a:t>Mobile Testing</a:t>
             </a:r>
-            <a:endParaRPr lang="en-US" sz="3200" dirty="0"/>
+            <a:endParaRPr lang="en-US" sz="3200"/>
           </a:p>
         </p:txBody>
       </p:sp>
@@ -24062,7 +24936,7 @@
           <a:p>
             <a:pPr algn="l"/>
             <a:r>
-              <a:rPr lang="en" b="1" dirty="0"/>
+              <a:rPr lang="en" b="1"/>
               <a:t>Mobile Testing Highlights:</a:t>
             </a:r>
             <a:endParaRPr lang="en-US" b="1"/>
@@ -24073,7 +24947,7 @@
               <a:buChar char="•"/>
             </a:pPr>
             <a:r>
-              <a:rPr lang="en" b="1" dirty="0"/>
+              <a:rPr lang="en" b="1"/>
               <a:t>Platform: Android</a:t>
             </a:r>
           </a:p>
@@ -24083,7 +24957,7 @@
               <a:buChar char="•"/>
             </a:pPr>
             <a:r>
-              <a:rPr lang="en" b="1" dirty="0"/>
+              <a:rPr lang="en" b="1"/>
               <a:t>Tools: Android Studio, Appium</a:t>
             </a:r>
           </a:p>
@@ -24093,7 +24967,7 @@
               <a:buChar char="•"/>
             </a:pPr>
             <a:r>
-              <a:rPr lang="en" b="1" dirty="0"/>
+              <a:rPr lang="en" b="1"/>
               <a:t>Execution Environment: Android Emulator</a:t>
             </a:r>
           </a:p>
@@ -24103,7 +24977,7 @@
               <a:buChar char="•"/>
             </a:pPr>
             <a:r>
-              <a:rPr lang="en" b="1" dirty="0"/>
+              <a:rPr lang="en" b="1"/>
               <a:t>Test Coverage: Basic mobile system functionality</a:t>
             </a:r>
           </a:p>
@@ -24113,7 +24987,7 @@
               <a:buChar char="•"/>
             </a:pPr>
             <a:r>
-              <a:rPr lang="en" b="1" dirty="0"/>
+              <a:rPr lang="en" b="1"/>
               <a:t>Total Test Cases Executed: 3 Mobile Test Cases</a:t>
             </a:r>
           </a:p>
@@ -24123,7 +24997,7 @@
               <a:buChar char="•"/>
             </a:pPr>
             <a:r>
-              <a:rPr lang="en" b="1" dirty="0"/>
+              <a:rPr lang="en" b="1"/>
               <a:t>Testing Scope: Simple and targeted validation scenarios</a:t>
             </a:r>
           </a:p>
@@ -24137,7 +25011,7 @@
               </a:spcAft>
               <a:buNone/>
             </a:pPr>
-            <a:endParaRPr lang="en" dirty="0"/>
+            <a:endParaRPr lang="en"/>
           </a:p>
         </p:txBody>
       </p:sp>
@@ -24179,7 +25053,7 @@
 </p:sld>
 </file>
 
-<file path=ppt/slides/slide11.xml><?xml version="1.0" encoding="utf-8"?>
+<file path=ppt/slides/slide12.xml><?xml version="1.0" encoding="utf-8"?>
 <p:sld xmlns:a="http://schemas.openxmlformats.org/drawingml/2006/main" xmlns:r="http://schemas.openxmlformats.org/officeDocument/2006/relationships" xmlns:p="http://schemas.openxmlformats.org/presentationml/2006/main">
   <p:cSld>
     <p:spTree>
@@ -24235,7 +25109,7 @@
           <a:p>
             <a:pPr algn="l"/>
             <a:r>
-              <a:rPr lang="en" sz="7200" dirty="0"/>
+              <a:rPr lang="en" sz="7200"/>
               <a:t>THANKS!</a:t>
             </a:r>
             <a:endParaRPr lang="en" sz="7200" b="0">
@@ -24245,7 +25119,7 @@
             </a:endParaRPr>
           </a:p>
           <a:p>
-            <a:endParaRPr lang="en" sz="3200" dirty="0"/>
+            <a:endParaRPr lang="en" sz="3200"/>
           </a:p>
         </p:txBody>
       </p:sp>
@@ -24282,7 +25156,7 @@
           <a:p>
             <a:pPr algn="l" rtl="0"/>
             <a:r>
-              <a:rPr lang="en-US" sz="1600" b="1" i="0" u="none" strike="noStrike" baseline="0" dirty="0">
+              <a:rPr lang="en-US" sz="1600" b="1" i="0" u="none" strike="noStrike" baseline="0">
                 <a:solidFill>
                   <a:srgbClr val="202A41"/>
                 </a:solidFill>
@@ -24293,7 +25167,7 @@
               <a:t>Do you have any questions?</a:t>
             </a:r>
             <a:r>
-              <a:rPr lang="en-US" sz="1600" b="0" i="0" dirty="0">
+              <a:rPr lang="en-US" sz="1600" b="0" i="0">
                 <a:solidFill>
                   <a:srgbClr val="202A41"/>
                 </a:solidFill>
@@ -24308,7 +25182,7 @@
           <a:p>
             <a:pPr algn="l" rtl="0"/>
             <a:r>
-              <a:rPr lang="en-US" sz="1600" b="0" i="0" u="none" strike="noStrike" baseline="0" dirty="0">
+              <a:rPr lang="en-US" sz="1600" b="0" i="0" u="none" strike="noStrike" baseline="0">
                 <a:solidFill>
                   <a:srgbClr val="202A41"/>
                 </a:solidFill>
@@ -24319,7 +25193,7 @@
               <a:t>Khasawnehasmaa@gmail.com</a:t>
             </a:r>
             <a:r>
-              <a:rPr lang="en-US" sz="1600" b="0" i="0" dirty="0">
+              <a:rPr lang="en-US" sz="1600" b="0" i="0">
                 <a:solidFill>
                   <a:srgbClr val="202A41"/>
                 </a:solidFill>
@@ -24333,7 +25207,7 @@
           <a:p>
             <a:pPr algn="l" rtl="0"/>
             <a:r>
-              <a:rPr lang="en-US" sz="1600" b="0" i="0" u="none" strike="noStrike" baseline="0" dirty="0">
+              <a:rPr lang="en-US" sz="1600" b="0" i="0" u="none" strike="noStrike" baseline="0">
                 <a:solidFill>
                   <a:srgbClr val="202A41"/>
                 </a:solidFill>
@@ -24344,7 +25218,7 @@
               <a:t>+962 797248869</a:t>
             </a:r>
             <a:r>
-              <a:rPr lang="en-US" sz="1600" b="0" i="0" dirty="0">
+              <a:rPr lang="en-US" sz="1600" b="0" i="0">
                 <a:solidFill>
                   <a:srgbClr val="202A41"/>
                 </a:solidFill>
@@ -24358,7 +25232,7 @@
           <a:p>
             <a:pPr algn="l" rtl="0"/>
             <a:r>
-              <a:rPr lang="en-US" sz="1600" b="1" i="0" u="sng" strike="noStrike" baseline="0" dirty="0">
+              <a:rPr lang="en-US" sz="1600" b="1" i="0" u="sng" strike="noStrike" baseline="0">
                 <a:solidFill>
                   <a:srgbClr val="202A41"/>
                 </a:solidFill>
@@ -24999,7 +25873,7 @@
             <a:lstStyle/>
             <a:p>
               <a:r>
-                <a:rPr lang="en-US" sz="1100" dirty="0">
+                <a:rPr lang="en-US" sz="1100">
                   <a:highlight>
                     <a:srgbClr val="FFFFFF"/>
                   </a:highlight>
@@ -25008,12 +25882,12 @@
                 <a:t>asmaa-khasawneh</a:t>
               </a:r>
               <a:br>
-                <a:rPr lang="en-US" dirty="0"/>
+                <a:rPr lang="en-US"/>
               </a:br>
               <a:endParaRPr lang="en-US"/>
             </a:p>
             <a:p>
-              <a:endParaRPr lang="en-US" dirty="0"/>
+              <a:endParaRPr lang="en-US"/>
             </a:p>
             <a:p>
               <a:pPr algn="ctr"/>
@@ -27891,7 +28765,7 @@
         </p:blipFill>
         <p:spPr>
           <a:xfrm>
-            <a:off x="195804" y="2005914"/>
+            <a:off x="328893" y="2005914"/>
             <a:ext cx="3690750" cy="2905348"/>
           </a:xfrm>
           <a:prstGeom prst="rect">
@@ -27921,7 +28795,7 @@
         </p:blipFill>
         <p:spPr>
           <a:xfrm>
-            <a:off x="4064915" y="2004741"/>
+            <a:off x="4370237" y="2004741"/>
             <a:ext cx="4350147" cy="2903667"/>
           </a:xfrm>
           <a:prstGeom prst="rect">
@@ -28017,8 +28891,8 @@
         </p:nvSpPr>
         <p:spPr>
           <a:xfrm>
-            <a:off x="518" y="1648808"/>
-            <a:ext cx="9141581" cy="2124489"/>
+            <a:off x="518" y="1022507"/>
+            <a:ext cx="7376655" cy="1032837"/>
           </a:xfrm>
           <a:prstGeom prst="rect">
             <a:avLst/>
@@ -28031,7 +28905,7 @@
           <a:lstStyle/>
           <a:p>
             <a:r>
-              <a:rPr lang="en-US" sz="1600">
+              <a:rPr lang="en-US" dirty="0">
                 <a:solidFill>
                   <a:schemeClr val="tx2">
                     <a:lumMod val="25000"/>
@@ -28040,13 +28914,6 @@
               </a:rPr>
               <a:t>Postman Testing Highlights:</a:t>
             </a:r>
-            <a:endParaRPr lang="en-US">
-              <a:solidFill>
-                <a:schemeClr val="tx2">
-                  <a:lumMod val="25000"/>
-                </a:schemeClr>
-              </a:solidFill>
-            </a:endParaRPr>
           </a:p>
           <a:p>
             <a:pPr marL="285750" indent="-285750">
@@ -28054,7 +28921,7 @@
               <a:buChar char="•"/>
             </a:pPr>
             <a:r>
-              <a:rPr lang="en-US" sz="1600">
+              <a:rPr lang="en-US" dirty="0">
                 <a:solidFill>
                   <a:schemeClr val="tx2">
                     <a:lumMod val="25000"/>
@@ -28064,7 +28931,7 @@
               <a:t>Total Requests: </a:t>
             </a:r>
             <a:r>
-              <a:rPr lang="en-US" sz="1600" b="1">
+              <a:rPr lang="en-US" b="1" dirty="0">
                 <a:solidFill>
                   <a:schemeClr val="tx2">
                     <a:lumMod val="25000"/>
@@ -28074,7 +28941,7 @@
               <a:t>23</a:t>
             </a:r>
             <a:r>
-              <a:rPr lang="en-US" sz="1600">
+              <a:rPr lang="en-US" dirty="0">
                 <a:solidFill>
                   <a:schemeClr val="tx2">
                     <a:lumMod val="25000"/>
@@ -28083,13 +28950,6 @@
               </a:rPr>
               <a:t> API Requests</a:t>
             </a:r>
-            <a:endParaRPr lang="en-US">
-              <a:solidFill>
-                <a:schemeClr val="tx2">
-                  <a:lumMod val="25000"/>
-                </a:schemeClr>
-              </a:solidFill>
-            </a:endParaRPr>
           </a:p>
           <a:p>
             <a:pPr marL="285750" indent="-285750">
@@ -28097,47 +28957,7 @@
               <a:buChar char="•"/>
             </a:pPr>
             <a:r>
-              <a:rPr lang="en-US" sz="1600">
-                <a:solidFill>
-                  <a:schemeClr val="tx2">
-                    <a:lumMod val="25000"/>
-                  </a:schemeClr>
-                </a:solidFill>
-              </a:rPr>
-              <a:t>Collection Structure: Single collection organized into folders based on functionality</a:t>
-            </a:r>
-            <a:endParaRPr lang="en-US">
-              <a:solidFill>
-                <a:schemeClr val="tx2">
-                  <a:lumMod val="25000"/>
-                </a:schemeClr>
-              </a:solidFill>
-            </a:endParaRPr>
-          </a:p>
-          <a:p>
-            <a:pPr marL="285750" indent="-285750">
-              <a:buFont typeface="Arial"/>
-              <a:buChar char="•"/>
-            </a:pPr>
-            <a:r>
-              <a:rPr lang="en-US" sz="1600">
-                <a:solidFill>
-                  <a:schemeClr val="tx2">
-                    <a:lumMod val="25000"/>
-                  </a:schemeClr>
-                </a:solidFill>
-              </a:rPr>
-              <a:t>Environment Management: All requests connected to a shared environment</a:t>
-            </a:r>
-            <a:endParaRPr lang="en-US"/>
-          </a:p>
-          <a:p>
-            <a:pPr marL="285750" indent="-285750">
-              <a:buFont typeface="Arial"/>
-              <a:buChar char="•"/>
-            </a:pPr>
-            <a:r>
-              <a:rPr lang="en-US" sz="1600">
+              <a:rPr lang="en-US" dirty="0">
                 <a:solidFill>
                   <a:schemeClr val="tx2">
                     <a:lumMod val="25000"/>
@@ -28146,7 +28966,6 @@
               </a:rPr>
               <a:t>Data-Driven Testing: CSV files used to support logic-based data-driven execution</a:t>
             </a:r>
-            <a:endParaRPr lang="en-US"/>
           </a:p>
           <a:p>
             <a:pPr marL="285750" indent="-285750">
@@ -28154,7 +28973,7 @@
               <a:buChar char="•"/>
             </a:pPr>
             <a:r>
-              <a:rPr lang="en-US" sz="1600">
+              <a:rPr lang="en-US" dirty="0">
                 <a:solidFill>
                   <a:schemeClr val="tx2">
                     <a:lumMod val="25000"/>
@@ -28163,7 +28982,6 @@
               </a:rPr>
               <a:t>Dynamic Data Handling: Response values stored as environment variables for reuse</a:t>
             </a:r>
-            <a:endParaRPr lang="en-US"/>
           </a:p>
           <a:p>
             <a:pPr marL="285750" indent="-285750">
@@ -28171,7 +28989,7 @@
               <a:buChar char="•"/>
             </a:pPr>
             <a:r>
-              <a:rPr lang="en-US" sz="1600">
+              <a:rPr lang="en-US" dirty="0">
                 <a:solidFill>
                   <a:schemeClr val="tx2">
                     <a:lumMod val="25000"/>
@@ -28180,7 +28998,6 @@
               </a:rPr>
               <a:t>Randomization: Random data generation applied where needed to increase test coverage</a:t>
             </a:r>
-            <a:endParaRPr lang="en-US"/>
           </a:p>
           <a:p>
             <a:pPr marL="0" indent="0"/>
@@ -28196,6 +29013,98 @@
           </a:p>
         </p:txBody>
       </p:sp>
+      <p:pic>
+        <p:nvPicPr>
+          <p:cNvPr id="2" name="Picture 1" descr="A screenshot of a computer">
+            <a:extLst>
+              <a:ext uri="{FF2B5EF4-FFF2-40B4-BE49-F238E27FC236}">
+                <a16:creationId xmlns:a16="http://schemas.microsoft.com/office/drawing/2014/main" id="{7064E727-8402-65D4-75BF-27DEAEBA1423}"/>
+              </a:ext>
+            </a:extLst>
+          </p:cNvPr>
+          <p:cNvPicPr>
+            <a:picLocks noChangeAspect="1"/>
+          </p:cNvPicPr>
+          <p:nvPr/>
+        </p:nvPicPr>
+        <p:blipFill>
+          <a:blip r:embed="rId3"/>
+          <a:srcRect r="72718" b="42555"/>
+          <a:stretch>
+            <a:fillRect/>
+          </a:stretch>
+        </p:blipFill>
+        <p:spPr>
+          <a:xfrm>
+            <a:off x="6815979" y="638839"/>
+            <a:ext cx="2187345" cy="1564331"/>
+          </a:xfrm>
+          <a:prstGeom prst="rect">
+            <a:avLst/>
+          </a:prstGeom>
+        </p:spPr>
+      </p:pic>
+      <p:pic>
+        <p:nvPicPr>
+          <p:cNvPr id="3" name="Picture 2" descr="A screenshot of a computer program&#10;&#10;AI-generated content may be incorrect.">
+            <a:extLst>
+              <a:ext uri="{FF2B5EF4-FFF2-40B4-BE49-F238E27FC236}">
+                <a16:creationId xmlns:a16="http://schemas.microsoft.com/office/drawing/2014/main" id="{7535D31E-4029-76E3-ACAE-E6565B421284}"/>
+              </a:ext>
+            </a:extLst>
+          </p:cNvPr>
+          <p:cNvPicPr>
+            <a:picLocks noChangeAspect="1"/>
+          </p:cNvPicPr>
+          <p:nvPr/>
+        </p:nvPicPr>
+        <p:blipFill>
+          <a:blip r:embed="rId4"/>
+          <a:srcRect t="8718" r="32077" b="7692"/>
+          <a:stretch>
+            <a:fillRect/>
+          </a:stretch>
+        </p:blipFill>
+        <p:spPr>
+          <a:xfrm>
+            <a:off x="840441" y="2350674"/>
+            <a:ext cx="3731561" cy="2468159"/>
+          </a:xfrm>
+          <a:prstGeom prst="rect">
+            <a:avLst/>
+          </a:prstGeom>
+        </p:spPr>
+      </p:pic>
+      <p:pic>
+        <p:nvPicPr>
+          <p:cNvPr id="4" name="Picture 3" descr="A screenshot of a computer&#10;&#10;AI-generated content may be incorrect.">
+            <a:extLst>
+              <a:ext uri="{FF2B5EF4-FFF2-40B4-BE49-F238E27FC236}">
+                <a16:creationId xmlns:a16="http://schemas.microsoft.com/office/drawing/2014/main" id="{F2796921-A464-0584-33CA-8D6D50810402}"/>
+              </a:ext>
+            </a:extLst>
+          </p:cNvPr>
+          <p:cNvPicPr>
+            <a:picLocks noChangeAspect="1"/>
+          </p:cNvPicPr>
+          <p:nvPr/>
+        </p:nvPicPr>
+        <p:blipFill>
+          <a:blip r:embed="rId5"/>
+          <a:stretch>
+            <a:fillRect/>
+          </a:stretch>
+        </p:blipFill>
+        <p:spPr>
+          <a:xfrm>
+            <a:off x="5039565" y="2366683"/>
+            <a:ext cx="3216649" cy="2452408"/>
+          </a:xfrm>
+          <a:prstGeom prst="rect">
+            <a:avLst/>
+          </a:prstGeom>
+        </p:spPr>
+      </p:pic>
     </p:spTree>
     <p:extLst>
       <p:ext uri="{BB962C8B-B14F-4D97-AF65-F5344CB8AC3E}">
@@ -29125,7 +30034,7 @@
   <p:cSld>
     <p:spTree>
       <p:nvGrpSpPr>
-        <p:cNvPr id="1" name="Shape 442"/>
+        <p:cNvPr id="1" name=""/>
         <p:cNvGrpSpPr/>
         <p:nvPr/>
       </p:nvGrpSpPr>
@@ -29139,144 +30048,42 @@
       </p:grpSpPr>
       <p:sp>
         <p:nvSpPr>
-          <p:cNvPr id="443" name="Google Shape;443;p43"/>
-          <p:cNvSpPr txBox="1">
-            <a:spLocks noGrp="1"/>
-          </p:cNvSpPr>
-          <p:nvPr>
-            <p:ph type="subTitle" idx="6"/>
-          </p:nvPr>
-        </p:nvSpPr>
-        <p:spPr>
-          <a:xfrm>
-            <a:off x="720000" y="3146911"/>
-            <a:ext cx="3549600" cy="375000"/>
-          </a:xfrm>
-          <a:prstGeom prst="rect">
-            <a:avLst/>
-          </a:prstGeom>
-        </p:spPr>
-        <p:txBody>
-          <a:bodyPr spcFirstLastPara="1" wrap="square" lIns="91425" tIns="91425" rIns="91425" bIns="91425" anchor="b" anchorCtr="0">
-            <a:noAutofit/>
-          </a:bodyPr>
-          <a:lstStyle/>
-          <a:p>
-            <a:pPr marL="0" indent="0"/>
-            <a:r>
-              <a:rPr lang="en"/>
-              <a:t>Design Approach:</a:t>
-            </a:r>
-            <a:endParaRPr lang="en-US"/>
-          </a:p>
-        </p:txBody>
-      </p:sp>
-      <p:sp>
-        <p:nvSpPr>
-          <p:cNvPr id="444" name="Google Shape;444;p43"/>
-          <p:cNvSpPr txBox="1">
+          <p:cNvPr id="2" name="Title 1">
+            <a:extLst>
+              <a:ext uri="{FF2B5EF4-FFF2-40B4-BE49-F238E27FC236}">
+                <a16:creationId xmlns:a16="http://schemas.microsoft.com/office/drawing/2014/main" id="{B92B3990-305F-546F-5988-BB53BD0A9A50}"/>
+              </a:ext>
+            </a:extLst>
+          </p:cNvPr>
+          <p:cNvSpPr>
             <a:spLocks noGrp="1"/>
           </p:cNvSpPr>
           <p:nvPr>
             <p:ph type="title"/>
           </p:nvPr>
         </p:nvSpPr>
-        <p:spPr>
-          <a:xfrm>
-            <a:off x="720000" y="539500"/>
-            <a:ext cx="7704000" cy="572700"/>
-          </a:xfrm>
-          <a:prstGeom prst="rect">
-            <a:avLst/>
-          </a:prstGeom>
-        </p:spPr>
+        <p:spPr/>
         <p:txBody>
-          <a:bodyPr spcFirstLastPara="1" wrap="square" lIns="91425" tIns="91425" rIns="91425" bIns="91425" anchor="t" anchorCtr="0">
-            <a:noAutofit/>
-          </a:bodyPr>
+          <a:bodyPr/>
           <a:lstStyle/>
           <a:p>
             <a:r>
-              <a:rPr lang="en"/>
-              <a:t>UI Automation Testing</a:t>
+              <a:rPr lang="en-US" dirty="0"/>
+              <a:t>K6 Analysis </a:t>
             </a:r>
-            <a:endParaRPr lang="en-US"/>
           </a:p>
         </p:txBody>
       </p:sp>
       <p:sp>
         <p:nvSpPr>
-          <p:cNvPr id="445" name="Google Shape;445;p43"/>
-          <p:cNvSpPr txBox="1">
-            <a:spLocks noGrp="1"/>
-          </p:cNvSpPr>
-          <p:nvPr>
-            <p:ph type="subTitle" idx="1"/>
-          </p:nvPr>
-        </p:nvSpPr>
-        <p:spPr>
-          <a:xfrm>
-            <a:off x="422507" y="1679350"/>
-            <a:ext cx="3549600" cy="1207800"/>
-          </a:xfrm>
-          <a:prstGeom prst="rect">
-            <a:avLst/>
-          </a:prstGeom>
-        </p:spPr>
-        <p:txBody>
-          <a:bodyPr spcFirstLastPara="1" wrap="square" lIns="91425" tIns="91425" rIns="91425" bIns="91425" anchor="t" anchorCtr="0">
-            <a:noAutofit/>
-          </a:bodyPr>
-          <a:lstStyle/>
-          <a:p>
-            <a:pPr marL="285750" indent="-285750">
-              <a:buFont typeface="Arial"/>
-              <a:buChar char="•"/>
-            </a:pPr>
-            <a:r>
-              <a:rPr lang="en"/>
-              <a:t>Tests organized into separate classes based on functionality</a:t>
-            </a:r>
-            <a:endParaRPr lang="en-US"/>
-          </a:p>
-          <a:p>
-            <a:pPr marL="285750" indent="-285750">
-              <a:buFont typeface="Arial"/>
-              <a:buChar char="•"/>
-            </a:pPr>
-            <a:r>
-              <a:rPr lang="en"/>
-              <a:t>User-related actions handled in dedicated classes</a:t>
-            </a:r>
-          </a:p>
-          <a:p>
-            <a:pPr marL="285750" indent="-285750">
-              <a:buFont typeface="Arial"/>
-              <a:buChar char="•"/>
-            </a:pPr>
-            <a:r>
-              <a:rPr lang="en"/>
-              <a:t>Test data separated into independent data classes</a:t>
-            </a:r>
-          </a:p>
-          <a:p>
-            <a:pPr marL="0" lvl="0" indent="0" algn="l">
-              <a:spcBef>
-                <a:spcPts val="0"/>
-              </a:spcBef>
-              <a:spcAft>
-                <a:spcPts val="0"/>
-              </a:spcAft>
-              <a:buNone/>
-            </a:pPr>
-            <a:endParaRPr lang="en"/>
-          </a:p>
-        </p:txBody>
-      </p:sp>
-      <p:sp>
-        <p:nvSpPr>
-          <p:cNvPr id="447" name="Google Shape;447;p43"/>
-          <p:cNvSpPr txBox="1">
+          <p:cNvPr id="5" name="Subtitle 4">
+            <a:extLst>
+              <a:ext uri="{FF2B5EF4-FFF2-40B4-BE49-F238E27FC236}">
+                <a16:creationId xmlns:a16="http://schemas.microsoft.com/office/drawing/2014/main" id="{C514EC85-79C0-4808-0462-C8B46CED5EE8}"/>
+              </a:ext>
+            </a:extLst>
+          </p:cNvPr>
+          <p:cNvSpPr>
             <a:spLocks noGrp="1"/>
           </p:cNvSpPr>
           <p:nvPr>
@@ -29285,121 +30092,85 @@
         </p:nvSpPr>
         <p:spPr>
           <a:xfrm>
-            <a:off x="422507" y="3396201"/>
-            <a:ext cx="3549600" cy="1489635"/>
+            <a:off x="90398" y="827115"/>
+            <a:ext cx="5604530" cy="2790632"/>
           </a:xfrm>
-          <a:prstGeom prst="rect">
-            <a:avLst/>
-          </a:prstGeom>
         </p:spPr>
         <p:txBody>
-          <a:bodyPr spcFirstLastPara="1" wrap="square" lIns="91425" tIns="91425" rIns="91425" bIns="91425" anchor="t" anchorCtr="0">
-            <a:noAutofit/>
-          </a:bodyPr>
+          <a:bodyPr/>
           <a:lstStyle/>
           <a:p>
             <a:pPr marL="285750" indent="-285750">
               <a:buFont typeface="Arial"/>
               <a:buChar char="•"/>
             </a:pPr>
-            <a:r>
-              <a:rPr lang="en"/>
-              <a:t>Inheritance applied to reduce duplication</a:t>
-            </a:r>
             <a:endParaRPr lang="en-US"/>
           </a:p>
           <a:p>
-            <a:pPr marL="285750" indent="-285750">
+            <a:pPr indent="0"/>
+            <a:br>
+              <a:rPr lang="en-US" dirty="0"/>
+            </a:br>
+            <a:endParaRPr lang="en-US" dirty="0"/>
+          </a:p>
+          <a:p>
+            <a:pPr algn="l"/>
+            <a:r>
+              <a:rPr lang="en-US" dirty="0"/>
+              <a:t> Analysis &amp; Conclusion</a:t>
+            </a:r>
+          </a:p>
+          <a:p>
+            <a:pPr marL="285750" indent="-285750" algn="l">
               <a:buFont typeface="Arial"/>
               <a:buChar char="•"/>
             </a:pPr>
             <a:r>
-              <a:rPr lang="en"/>
-              <a:t>Centralized base/source class for setup and configuration</a:t>
+              <a:rPr lang="en-US" b="0" dirty="0"/>
+              <a:t>The system remained stable under load</a:t>
             </a:r>
           </a:p>
           <a:p>
-            <a:pPr marL="285750" indent="-285750">
+            <a:pPr marL="285750" indent="-285750" algn="l">
               <a:buFont typeface="Arial"/>
               <a:buChar char="•"/>
             </a:pPr>
             <a:r>
-              <a:rPr lang="en"/>
-              <a:t>Test suite used to manage and execute tests</a:t>
+              <a:rPr lang="en-US" b="0" dirty="0"/>
+              <a:t>No failed requests were detected</a:t>
             </a:r>
           </a:p>
           <a:p>
-            <a:pPr marL="285750" indent="-285750">
+            <a:pPr marL="285750" indent="-285750" algn="l">
               <a:buFont typeface="Arial"/>
               <a:buChar char="•"/>
             </a:pPr>
             <a:r>
-              <a:rPr lang="en"/>
-              <a:t>Total Automated Tests: </a:t>
-            </a:r>
-            <a:r>
-              <a:rPr lang="en" b="1"/>
-              <a:t>22</a:t>
-            </a:r>
-            <a:r>
-              <a:rPr lang="en"/>
-              <a:t> UI Test Cases</a:t>
+              <a:rPr lang="en-US" b="0" dirty="0"/>
+              <a:t>Response times were acceptable and consistent</a:t>
             </a:r>
           </a:p>
           <a:p>
-            <a:pPr marL="0" lvl="0" indent="0" algn="l">
-              <a:spcBef>
-                <a:spcPts val="0"/>
-              </a:spcBef>
-              <a:spcAft>
-                <a:spcPts val="0"/>
-              </a:spcAft>
-              <a:buNone/>
+            <a:pPr marL="285750" indent="-285750" algn="l">
+              <a:buFont typeface="Arial"/>
+              <a:buChar char="•"/>
             </a:pPr>
-            <a:endParaRPr lang="en"/>
+            <a:r>
+              <a:rPr lang="en-US" b="0" dirty="0"/>
+              <a:t>The system meets the defined performance acceptance criteria</a:t>
+            </a:r>
           </a:p>
-        </p:txBody>
-      </p:sp>
-      <p:sp>
-        <p:nvSpPr>
-          <p:cNvPr id="449" name="Google Shape;449;p43"/>
-          <p:cNvSpPr txBox="1">
-            <a:spLocks noGrp="1"/>
-          </p:cNvSpPr>
-          <p:nvPr>
-            <p:ph type="subTitle" idx="5"/>
-          </p:nvPr>
-        </p:nvSpPr>
-        <p:spPr>
-          <a:xfrm>
-            <a:off x="720000" y="1429886"/>
-            <a:ext cx="3549600" cy="375000"/>
-          </a:xfrm>
-          <a:prstGeom prst="rect">
-            <a:avLst/>
-          </a:prstGeom>
-        </p:spPr>
-        <p:txBody>
-          <a:bodyPr spcFirstLastPara="1" wrap="square" lIns="91425" tIns="91425" rIns="91425" bIns="91425" anchor="b" anchorCtr="0">
-            <a:noAutofit/>
-          </a:bodyPr>
-          <a:lstStyle/>
           <a:p>
-            <a:pPr marL="0" indent="0"/>
-            <a:r>
-              <a:rPr lang="en"/>
-              <a:t>Framework Structure:</a:t>
-            </a:r>
-            <a:endParaRPr lang="en-US"/>
+            <a:endParaRPr lang="en-US" dirty="0"/>
           </a:p>
         </p:txBody>
       </p:sp>
       <p:pic>
         <p:nvPicPr>
-          <p:cNvPr id="14" name="Picture 13" descr="A screenshot of a computer program&#10;&#10;AI-generated content may be incorrect.">
+          <p:cNvPr id="7" name="Picture 6" descr="A screenshot of a computer program&#10;&#10;AI-generated content may be incorrect.">
             <a:extLst>
               <a:ext uri="{FF2B5EF4-FFF2-40B4-BE49-F238E27FC236}">
-                <a16:creationId xmlns:a16="http://schemas.microsoft.com/office/drawing/2014/main" id="{807F2544-DFF8-7D3E-55C4-3905B6660D47}"/>
+                <a16:creationId xmlns:a16="http://schemas.microsoft.com/office/drawing/2014/main" id="{AE12AE73-42BB-2F70-6641-F6002B43AB18}"/>
               </a:ext>
             </a:extLst>
           </p:cNvPr>
@@ -29416,39 +30187,8 @@
         </p:blipFill>
         <p:spPr>
           <a:xfrm>
-            <a:off x="3970424" y="1356726"/>
-            <a:ext cx="2079974" cy="3573049"/>
-          </a:xfrm>
-          <a:prstGeom prst="rect">
-            <a:avLst/>
-          </a:prstGeom>
-        </p:spPr>
-      </p:pic>
-      <p:pic>
-        <p:nvPicPr>
-          <p:cNvPr id="2" name="Picture 1" descr="A screenshot of a computer&#10;&#10;AI-generated content may be incorrect.">
-            <a:extLst>
-              <a:ext uri="{FF2B5EF4-FFF2-40B4-BE49-F238E27FC236}">
-                <a16:creationId xmlns:a16="http://schemas.microsoft.com/office/drawing/2014/main" id="{CC556F98-B8E2-23D4-0738-BD5FC3019F05}"/>
-              </a:ext>
-            </a:extLst>
-          </p:cNvPr>
-          <p:cNvPicPr>
-            <a:picLocks noChangeAspect="1"/>
-          </p:cNvPicPr>
-          <p:nvPr/>
-        </p:nvPicPr>
-        <p:blipFill>
-          <a:blip r:embed="rId4"/>
-          <a:srcRect l="-986" t="568" r="26035" b="-2467"/>
-          <a:stretch>
-            <a:fillRect/>
-          </a:stretch>
-        </p:blipFill>
-        <p:spPr>
-          <a:xfrm>
-            <a:off x="6101020" y="2098056"/>
-            <a:ext cx="2929135" cy="2097511"/>
+            <a:off x="5823999" y="900308"/>
+            <a:ext cx="3234488" cy="3828268"/>
           </a:xfrm>
           <a:prstGeom prst="rect">
             <a:avLst/>
@@ -29456,6 +30196,11 @@
         </p:spPr>
       </p:pic>
     </p:spTree>
+    <p:extLst>
+      <p:ext uri="{BB962C8B-B14F-4D97-AF65-F5344CB8AC3E}">
+        <p14:creationId xmlns:p14="http://schemas.microsoft.com/office/powerpoint/2010/main" val="2992824690"/>
+      </p:ext>
+    </p:extLst>
   </p:cSld>
   <p:clrMapOvr>
     <a:masterClrMapping/>

--- a/08-Presentation/Asmaa-Presentation.pptx
+++ b/08-Presentation/Asmaa-Presentation.pptx
@@ -6,7 +6,7 @@
     <p:sldMasterId id="2147483681" r:id="rId2"/>
   </p:sldMasterIdLst>
   <p:notesMasterIdLst>
-    <p:notesMasterId r:id="rId15"/>
+    <p:notesMasterId r:id="rId16"/>
   </p:notesMasterIdLst>
   <p:sldIdLst>
     <p:sldId id="256" r:id="rId3"/>
@@ -20,29 +20,30 @@
     <p:sldId id="301" r:id="rId11"/>
     <p:sldId id="264" r:id="rId12"/>
     <p:sldId id="267" r:id="rId13"/>
-    <p:sldId id="300" r:id="rId14"/>
+    <p:sldId id="302" r:id="rId14"/>
+    <p:sldId id="300" r:id="rId15"/>
   </p:sldIdLst>
   <p:sldSz cx="9144000" cy="5143500" type="screen16x9"/>
   <p:notesSz cx="6858000" cy="9144000"/>
   <p:embeddedFontLst>
     <p:embeddedFont>
       <p:font typeface="Anaheim" panose="020B0604020202020204" charset="0"/>
-      <p:regular r:id="rId16"/>
-      <p:bold r:id="rId17"/>
+      <p:regular r:id="rId17"/>
+      <p:bold r:id="rId18"/>
     </p:embeddedFont>
     <p:embeddedFont>
       <p:font typeface="Poppins" panose="00000500000000000000" pitchFamily="2" charset="0"/>
-      <p:regular r:id="rId18"/>
-      <p:bold r:id="rId19"/>
-      <p:italic r:id="rId20"/>
-      <p:boldItalic r:id="rId21"/>
+      <p:regular r:id="rId19"/>
+      <p:bold r:id="rId20"/>
+      <p:italic r:id="rId21"/>
+      <p:boldItalic r:id="rId22"/>
     </p:embeddedFont>
     <p:embeddedFont>
       <p:font typeface="Roboto Medium" panose="02000000000000000000" pitchFamily="2" charset="0"/>
-      <p:regular r:id="rId22"/>
-      <p:bold r:id="rId23"/>
-      <p:italic r:id="rId24"/>
-      <p:boldItalic r:id="rId25"/>
+      <p:regular r:id="rId23"/>
+      <p:bold r:id="rId24"/>
+      <p:italic r:id="rId25"/>
+      <p:boldItalic r:id="rId26"/>
     </p:embeddedFont>
   </p:embeddedFontLst>
   <p:defaultTextStyle>
@@ -287,6 +288,7 @@
     <p1510:client id="{8E97466D-3B20-41AB-A7A5-32CC200ADA1A}" v="50" dt="2026-02-08T16:27:15.034"/>
     <p1510:client id="{9D5B01E1-8ADC-42D0-9476-AE4CCBBBF1A5}" v="175" dt="2026-02-08T18:53:19.072"/>
     <p1510:client id="{B81DE52B-ACF1-442C-886F-C7E1C99D8B9B}" v="275" dt="2026-02-08T19:52:51.732"/>
+    <p1510:client id="{C3677238-7711-467B-A277-C5EC94D00965}" v="26" dt="2026-02-10T06:01:44.454"/>
   </p1510:revLst>
 </p1510:revInfo>
 </file>
@@ -1252,6 +1254,94 @@
 </file>
 
 <file path=ppt/notesSlides/notesSlide12.xml><?xml version="1.0" encoding="utf-8"?>
+<p:notes xmlns:a="http://schemas.openxmlformats.org/drawingml/2006/main" xmlns:r="http://schemas.openxmlformats.org/officeDocument/2006/relationships" xmlns:p="http://schemas.openxmlformats.org/presentationml/2006/main">
+  <p:cSld>
+    <p:spTree>
+      <p:nvGrpSpPr>
+        <p:cNvPr id="1" name=""/>
+        <p:cNvGrpSpPr/>
+        <p:nvPr/>
+      </p:nvGrpSpPr>
+      <p:grpSpPr>
+        <a:xfrm>
+          <a:off x="0" y="0"/>
+          <a:ext cx="0" cy="0"/>
+          <a:chOff x="0" y="0"/>
+          <a:chExt cx="0" cy="0"/>
+        </a:xfrm>
+      </p:grpSpPr>
+      <p:sp>
+        <p:nvSpPr>
+          <p:cNvPr id="2" name="Slide Image Placeholder 1"/>
+          <p:cNvSpPr>
+            <a:spLocks noGrp="1" noRot="1" noChangeAspect="1"/>
+          </p:cNvSpPr>
+          <p:nvPr>
+            <p:ph type="sldImg"/>
+          </p:nvPr>
+        </p:nvSpPr>
+        <p:spPr/>
+      </p:sp>
+      <p:sp>
+        <p:nvSpPr>
+          <p:cNvPr id="3" name="Notes Placeholder 2"/>
+          <p:cNvSpPr>
+            <a:spLocks noGrp="1"/>
+          </p:cNvSpPr>
+          <p:nvPr>
+            <p:ph type="body" idx="1"/>
+          </p:nvPr>
+        </p:nvSpPr>
+        <p:spPr/>
+        <p:txBody>
+          <a:bodyPr/>
+          <a:lstStyle/>
+          <a:p>
+            <a:pPr marL="285750" indent="-285750">
+              <a:buChar char="•"/>
+            </a:pPr>
+            <a:r>
+              <a:rPr lang="en-US" b="1"/>
+              <a:t>GitHub was used for version control and project collaboration</a:t>
+            </a:r>
+            <a:endParaRPr lang="en-US"/>
+          </a:p>
+          <a:p>
+            <a:pPr marL="285750" indent="-285750">
+              <a:buChar char="•"/>
+            </a:pPr>
+            <a:r>
+              <a:rPr lang="en-US" b="1"/>
+              <a:t>CI/CD workflow was implemented using GitHub Actions</a:t>
+            </a:r>
+            <a:endParaRPr lang="en-US"/>
+          </a:p>
+          <a:p>
+            <a:pPr marL="171450" indent="-171450"/>
+            <a:r>
+              <a:rPr lang="en-US" b="1" dirty="0"/>
+              <a:t>Automation flow for Selenium, K6 and Postman </a:t>
+            </a:r>
+            <a:endParaRPr lang="en-US" dirty="0">
+              <a:ea typeface="Calibri"/>
+            </a:endParaRPr>
+          </a:p>
+        </p:txBody>
+      </p:sp>
+    </p:spTree>
+    <p:extLst>
+      <p:ext uri="{BB962C8B-B14F-4D97-AF65-F5344CB8AC3E}">
+        <p14:creationId xmlns:p14="http://schemas.microsoft.com/office/powerpoint/2010/main" val="3766884515"/>
+      </p:ext>
+    </p:extLst>
+  </p:cSld>
+  <p:clrMapOvr>
+    <a:masterClrMapping/>
+  </p:clrMapOvr>
+</p:notes>
+</file>
+
+<file path=ppt/notesSlides/notesSlide13.xml><?xml version="1.0" encoding="utf-8"?>
 <p:notes xmlns:a="http://schemas.openxmlformats.org/drawingml/2006/main" xmlns:r="http://schemas.openxmlformats.org/officeDocument/2006/relationships" xmlns:p="http://schemas.openxmlformats.org/presentationml/2006/main" showMasterSp="0" showMasterPhAnim="0">
   <p:cSld>
     <p:spTree>
@@ -25054,6 +25144,162 @@
 </file>
 
 <file path=ppt/slides/slide12.xml><?xml version="1.0" encoding="utf-8"?>
+<p:sld xmlns:a="http://schemas.openxmlformats.org/drawingml/2006/main" xmlns:r="http://schemas.openxmlformats.org/officeDocument/2006/relationships" xmlns:p="http://schemas.openxmlformats.org/presentationml/2006/main">
+  <p:cSld>
+    <p:spTree>
+      <p:nvGrpSpPr>
+        <p:cNvPr id="1" name=""/>
+        <p:cNvGrpSpPr/>
+        <p:nvPr/>
+      </p:nvGrpSpPr>
+      <p:grpSpPr>
+        <a:xfrm>
+          <a:off x="0" y="0"/>
+          <a:ext cx="0" cy="0"/>
+          <a:chOff x="0" y="0"/>
+          <a:chExt cx="0" cy="0"/>
+        </a:xfrm>
+      </p:grpSpPr>
+      <p:sp>
+        <p:nvSpPr>
+          <p:cNvPr id="2" name="Title 1">
+            <a:extLst>
+              <a:ext uri="{FF2B5EF4-FFF2-40B4-BE49-F238E27FC236}">
+                <a16:creationId xmlns:a16="http://schemas.microsoft.com/office/drawing/2014/main" id="{AD48FC8E-5EC0-99C5-B130-C46985456140}"/>
+              </a:ext>
+            </a:extLst>
+          </p:cNvPr>
+          <p:cNvSpPr>
+            <a:spLocks noGrp="1"/>
+          </p:cNvSpPr>
+          <p:nvPr>
+            <p:ph type="title"/>
+          </p:nvPr>
+        </p:nvSpPr>
+        <p:spPr>
+          <a:xfrm>
+            <a:off x="2359068" y="244066"/>
+            <a:ext cx="4191000" cy="1043700"/>
+          </a:xfrm>
+        </p:spPr>
+        <p:txBody>
+          <a:bodyPr/>
+          <a:lstStyle/>
+          <a:p>
+            <a:r>
+              <a:rPr lang="en-US" sz="3600" dirty="0"/>
+              <a:t>GITHUB</a:t>
+            </a:r>
+          </a:p>
+        </p:txBody>
+      </p:sp>
+      <p:sp>
+        <p:nvSpPr>
+          <p:cNvPr id="3" name="Subtitle 2">
+            <a:extLst>
+              <a:ext uri="{FF2B5EF4-FFF2-40B4-BE49-F238E27FC236}">
+                <a16:creationId xmlns:a16="http://schemas.microsoft.com/office/drawing/2014/main" id="{A67D92A0-E6A9-3D18-0AEB-0C3B3C28D896}"/>
+              </a:ext>
+            </a:extLst>
+          </p:cNvPr>
+          <p:cNvSpPr>
+            <a:spLocks noGrp="1"/>
+          </p:cNvSpPr>
+          <p:nvPr>
+            <p:ph type="subTitle" idx="1"/>
+          </p:nvPr>
+        </p:nvSpPr>
+        <p:spPr>
+          <a:xfrm>
+            <a:off x="2359068" y="1282025"/>
+            <a:ext cx="4191000" cy="431100"/>
+          </a:xfrm>
+        </p:spPr>
+        <p:txBody>
+          <a:bodyPr/>
+          <a:lstStyle/>
+          <a:p>
+            <a:r>
+              <a:rPr lang="en-US" dirty="0"/>
+              <a:t>CI/CD</a:t>
+            </a:r>
+          </a:p>
+        </p:txBody>
+      </p:sp>
+      <p:pic>
+        <p:nvPicPr>
+          <p:cNvPr id="4" name="Picture 3" descr="A screenshot of a computer program&#10;&#10;AI-generated content may be incorrect.">
+            <a:extLst>
+              <a:ext uri="{FF2B5EF4-FFF2-40B4-BE49-F238E27FC236}">
+                <a16:creationId xmlns:a16="http://schemas.microsoft.com/office/drawing/2014/main" id="{16E66683-FA23-A7C7-A48F-A84AA220EBD3}"/>
+              </a:ext>
+            </a:extLst>
+          </p:cNvPr>
+          <p:cNvPicPr>
+            <a:picLocks noChangeAspect="1"/>
+          </p:cNvPicPr>
+          <p:nvPr/>
+        </p:nvPicPr>
+        <p:blipFill>
+          <a:blip r:embed="rId3"/>
+          <a:stretch>
+            <a:fillRect/>
+          </a:stretch>
+        </p:blipFill>
+        <p:spPr>
+          <a:xfrm>
+            <a:off x="5911112" y="2843604"/>
+            <a:ext cx="2457450" cy="771525"/>
+          </a:xfrm>
+          <a:prstGeom prst="rect">
+            <a:avLst/>
+          </a:prstGeom>
+        </p:spPr>
+      </p:pic>
+      <p:pic>
+        <p:nvPicPr>
+          <p:cNvPr id="5" name="Picture 4" descr="A screenshot of a computer program&#10;&#10;AI-generated content may be incorrect.">
+            <a:extLst>
+              <a:ext uri="{FF2B5EF4-FFF2-40B4-BE49-F238E27FC236}">
+                <a16:creationId xmlns:a16="http://schemas.microsoft.com/office/drawing/2014/main" id="{DB36F2B8-6B55-B86F-AA39-9774E39ED319}"/>
+              </a:ext>
+            </a:extLst>
+          </p:cNvPr>
+          <p:cNvPicPr>
+            <a:picLocks noChangeAspect="1"/>
+          </p:cNvPicPr>
+          <p:nvPr/>
+        </p:nvPicPr>
+        <p:blipFill>
+          <a:blip r:embed="rId4"/>
+          <a:stretch>
+            <a:fillRect/>
+          </a:stretch>
+        </p:blipFill>
+        <p:spPr>
+          <a:xfrm>
+            <a:off x="543186" y="1883276"/>
+            <a:ext cx="5121580" cy="2700403"/>
+          </a:xfrm>
+          <a:prstGeom prst="rect">
+            <a:avLst/>
+          </a:prstGeom>
+        </p:spPr>
+      </p:pic>
+    </p:spTree>
+    <p:extLst>
+      <p:ext uri="{BB962C8B-B14F-4D97-AF65-F5344CB8AC3E}">
+        <p14:creationId xmlns:p14="http://schemas.microsoft.com/office/powerpoint/2010/main" val="3584875142"/>
+      </p:ext>
+    </p:extLst>
+  </p:cSld>
+  <p:clrMapOvr>
+    <a:masterClrMapping/>
+  </p:clrMapOvr>
+</p:sld>
+</file>
+
+<file path=ppt/slides/slide13.xml><?xml version="1.0" encoding="utf-8"?>
 <p:sld xmlns:a="http://schemas.openxmlformats.org/drawingml/2006/main" xmlns:r="http://schemas.openxmlformats.org/officeDocument/2006/relationships" xmlns:p="http://schemas.openxmlformats.org/presentationml/2006/main">
   <p:cSld>
     <p:spTree>
